--- a/assessments/HS-LS1-1/slides/Day_3_LAB_build_copy_and_read_a_gene_gummy_DNA.pptx
+++ b/assessments/HS-LS1-1/slides/Day_3_LAB_build_copy_and_read_a_gene_gummy_DNA.pptx
@@ -3206,7 +3206,7 @@
               </a:defRPr>
             </a:pPr>
             <a:r>
-              <a:t>• Today's target: a gene's message is copied, and the copy is read to build a chain of amino acids (LS1-1.3)</a:t>
+              <a:t>• Today's target: a gene's message is copied, and the copy is read to build a chain of amino acids (LS1-1.2)</a:t>
             </a:r>
           </a:p>
         </p:txBody>
@@ -5033,7 +5033,7 @@
               </a:defRPr>
             </a:pPr>
             <a:r>
-              <a:t>• Exit ticket: CFA LS1-1.3 (6 minutes).</a:t>
+              <a:t>• Exit ticket: CFA LS1-1.2 (6 minutes).</a:t>
             </a:r>
           </a:p>
         </p:txBody>
